--- a/PlainMed.pptx
+++ b/PlainMed.pptx
@@ -2166,7 +2166,7 @@
         </p:blipFill>
         <p:spPr>
           <a:xfrm>
-            <a:off x="1381008" y="3142978"/>
+            <a:off x="1381008" y="3168856"/>
             <a:ext cx="5804795" cy="3204777"/>
           </a:xfrm>
           <a:prstGeom prst="rect">
